--- a/Report and PPT/2210992092_PPT.pptx
+++ b/Report and PPT/2210992092_PPT.pptx
@@ -3658,7 +3658,7 @@
                 <a:ea typeface="MS PGothic"/>
                 <a:cs typeface="Times New Roman" panose="02020603050405020304" pitchFamily="18" charset="0"/>
               </a:rPr>
-              <a:t>Ms. Isha Kansal (Supervisor, Chitkara University)</a:t>
+              <a:t>Dr. Isha Kansal, Assistant Professor (Supervisor, Chitkara University)</a:t>
             </a:r>
           </a:p>
           <a:p>
